--- a/05-ridge-lasso-elastic-net/slides.pptx
+++ b/05-ridge-lasso-elastic-net/slides.pptx
@@ -950,7 +950,7 @@
           <a:bodyPr anchor="t"/>
           <a:lstStyle>
             <a:lvl1pPr algn="l">
-              <a:defRPr sz="3000" b="1" cap="all"/>
+              <a:defRPr sz="2350" b="1" cap="all"/>
             </a:lvl1pPr>
           </a:lstStyle>
           <a:p>
@@ -982,7 +982,7 @@
           <a:lstStyle>
             <a:lvl1pPr marL="0" indent="0">
               <a:buNone/>
-              <a:defRPr sz="1500">
+              <a:defRPr sz="1150">
                 <a:solidFill>
                   <a:schemeClr val="tx1">
                     <a:tint val="75000"/>
@@ -992,7 +992,7 @@
             </a:lvl1pPr>
             <a:lvl2pPr marL="342900" indent="0">
               <a:buNone/>
-              <a:defRPr sz="1350">
+              <a:defRPr sz="1050">
                 <a:solidFill>
                   <a:schemeClr val="tx1">
                     <a:tint val="75000"/>
@@ -1002,7 +1002,7 @@
             </a:lvl2pPr>
             <a:lvl3pPr marL="685800" indent="0">
               <a:buNone/>
-              <a:defRPr sz="1200">
+              <a:defRPr sz="950">
                 <a:solidFill>
                   <a:schemeClr val="tx1">
                     <a:tint val="75000"/>
@@ -1012,7 +1012,7 @@
             </a:lvl3pPr>
             <a:lvl4pPr marL="1028700" indent="0">
               <a:buNone/>
-              <a:defRPr sz="1050">
+              <a:defRPr sz="800">
                 <a:solidFill>
                   <a:schemeClr val="tx1">
                     <a:tint val="75000"/>
@@ -1022,7 +1022,7 @@
             </a:lvl4pPr>
             <a:lvl5pPr marL="1371600" indent="0">
               <a:buNone/>
-              <a:defRPr sz="1050">
+              <a:defRPr sz="800">
                 <a:solidFill>
                   <a:schemeClr val="tx1">
                     <a:tint val="75000"/>
@@ -1032,7 +1032,7 @@
             </a:lvl5pPr>
             <a:lvl6pPr marL="1714500" indent="0">
               <a:buNone/>
-              <a:defRPr sz="1050">
+              <a:defRPr sz="800">
                 <a:solidFill>
                   <a:schemeClr val="tx1">
                     <a:tint val="75000"/>
@@ -1042,7 +1042,7 @@
             </a:lvl6pPr>
             <a:lvl7pPr marL="2057400" indent="0">
               <a:buNone/>
-              <a:defRPr sz="1050">
+              <a:defRPr sz="800">
                 <a:solidFill>
                   <a:schemeClr val="tx1">
                     <a:tint val="75000"/>
@@ -1052,7 +1052,7 @@
             </a:lvl7pPr>
             <a:lvl8pPr marL="2400300" indent="0">
               <a:buNone/>
-              <a:defRPr sz="1050">
+              <a:defRPr sz="800">
                 <a:solidFill>
                   <a:schemeClr val="tx1">
                     <a:tint val="75000"/>
@@ -1062,7 +1062,7 @@
             </a:lvl8pPr>
             <a:lvl9pPr marL="2743200" indent="0">
               <a:buNone/>
-              <a:defRPr sz="1050">
+              <a:defRPr sz="800">
                 <a:solidFill>
                   <a:schemeClr val="tx1">
                     <a:tint val="75000"/>
@@ -1217,31 +1217,31 @@
           <a:bodyPr/>
           <a:lstStyle>
             <a:lvl1pPr>
-              <a:defRPr sz="2100"/>
+              <a:defRPr sz="1650"/>
             </a:lvl1pPr>
             <a:lvl2pPr>
-              <a:defRPr sz="1800"/>
+              <a:defRPr sz="1400"/>
             </a:lvl2pPr>
             <a:lvl3pPr>
-              <a:defRPr sz="1500"/>
+              <a:defRPr sz="1150"/>
             </a:lvl3pPr>
             <a:lvl4pPr>
-              <a:defRPr sz="1350"/>
+              <a:defRPr sz="1050"/>
             </a:lvl4pPr>
             <a:lvl5pPr>
-              <a:defRPr sz="1350"/>
+              <a:defRPr sz="1050"/>
             </a:lvl5pPr>
             <a:lvl6pPr>
-              <a:defRPr sz="1350"/>
+              <a:defRPr sz="1050"/>
             </a:lvl6pPr>
             <a:lvl7pPr>
-              <a:defRPr sz="1350"/>
+              <a:defRPr sz="1050"/>
             </a:lvl7pPr>
             <a:lvl8pPr>
-              <a:defRPr sz="1350"/>
+              <a:defRPr sz="1050"/>
             </a:lvl8pPr>
             <a:lvl9pPr>
-              <a:defRPr sz="1350"/>
+              <a:defRPr sz="1050"/>
             </a:lvl9pPr>
           </a:lstStyle>
           <a:p>
@@ -1301,31 +1301,31 @@
           <a:bodyPr/>
           <a:lstStyle>
             <a:lvl1pPr>
-              <a:defRPr sz="2100"/>
+              <a:defRPr sz="1650"/>
             </a:lvl1pPr>
             <a:lvl2pPr>
-              <a:defRPr sz="1800"/>
+              <a:defRPr sz="1400"/>
             </a:lvl2pPr>
             <a:lvl3pPr>
-              <a:defRPr sz="1500"/>
+              <a:defRPr sz="1150"/>
             </a:lvl3pPr>
             <a:lvl4pPr>
-              <a:defRPr sz="1350"/>
+              <a:defRPr sz="1050"/>
             </a:lvl4pPr>
             <a:lvl5pPr>
-              <a:defRPr sz="1350"/>
+              <a:defRPr sz="1050"/>
             </a:lvl5pPr>
             <a:lvl6pPr>
-              <a:defRPr sz="1350"/>
+              <a:defRPr sz="1050"/>
             </a:lvl6pPr>
             <a:lvl7pPr>
-              <a:defRPr sz="1350"/>
+              <a:defRPr sz="1050"/>
             </a:lvl7pPr>
             <a:lvl8pPr>
-              <a:defRPr sz="1350"/>
+              <a:defRPr sz="1050"/>
             </a:lvl8pPr>
             <a:lvl9pPr>
-              <a:defRPr sz="1350"/>
+              <a:defRPr sz="1050"/>
             </a:lvl9pPr>
           </a:lstStyle>
           <a:p>
@@ -1507,39 +1507,39 @@
           <a:lstStyle>
             <a:lvl1pPr marL="0" indent="0">
               <a:buNone/>
-              <a:defRPr sz="1800" b="1"/>
+              <a:defRPr sz="1400" b="1"/>
             </a:lvl1pPr>
             <a:lvl2pPr marL="342900" indent="0">
               <a:buNone/>
-              <a:defRPr sz="1500" b="1"/>
+              <a:defRPr sz="1150" b="1"/>
             </a:lvl2pPr>
             <a:lvl3pPr marL="685800" indent="0">
               <a:buNone/>
-              <a:defRPr sz="1350" b="1"/>
+              <a:defRPr sz="1050" b="1"/>
             </a:lvl3pPr>
             <a:lvl4pPr marL="1028700" indent="0">
               <a:buNone/>
-              <a:defRPr sz="1200" b="1"/>
+              <a:defRPr sz="950" b="1"/>
             </a:lvl4pPr>
             <a:lvl5pPr marL="1371600" indent="0">
               <a:buNone/>
-              <a:defRPr sz="1200" b="1"/>
+              <a:defRPr sz="950" b="1"/>
             </a:lvl5pPr>
             <a:lvl6pPr marL="1714500" indent="0">
               <a:buNone/>
-              <a:defRPr sz="1200" b="1"/>
+              <a:defRPr sz="950" b="1"/>
             </a:lvl6pPr>
             <a:lvl7pPr marL="2057400" indent="0">
               <a:buNone/>
-              <a:defRPr sz="1200" b="1"/>
+              <a:defRPr sz="950" b="1"/>
             </a:lvl7pPr>
             <a:lvl8pPr marL="2400300" indent="0">
               <a:buNone/>
-              <a:defRPr sz="1200" b="1"/>
+              <a:defRPr sz="950" b="1"/>
             </a:lvl8pPr>
             <a:lvl9pPr marL="2743200" indent="0">
               <a:buNone/>
-              <a:defRPr sz="1200" b="1"/>
+              <a:defRPr sz="950" b="1"/>
             </a:lvl9pPr>
           </a:lstStyle>
           <a:p>
@@ -1571,31 +1571,31 @@
           <a:bodyPr/>
           <a:lstStyle>
             <a:lvl1pPr>
-              <a:defRPr sz="1800"/>
+              <a:defRPr sz="1400"/>
             </a:lvl1pPr>
             <a:lvl2pPr>
-              <a:defRPr sz="1500"/>
+              <a:defRPr sz="1150"/>
             </a:lvl2pPr>
             <a:lvl3pPr>
-              <a:defRPr sz="1350"/>
+              <a:defRPr sz="1050"/>
             </a:lvl3pPr>
             <a:lvl4pPr>
-              <a:defRPr sz="1200"/>
+              <a:defRPr sz="950"/>
             </a:lvl4pPr>
             <a:lvl5pPr>
-              <a:defRPr sz="1200"/>
+              <a:defRPr sz="950"/>
             </a:lvl5pPr>
             <a:lvl6pPr>
-              <a:defRPr sz="1200"/>
+              <a:defRPr sz="950"/>
             </a:lvl6pPr>
             <a:lvl7pPr>
-              <a:defRPr sz="1200"/>
+              <a:defRPr sz="950"/>
             </a:lvl7pPr>
             <a:lvl8pPr>
-              <a:defRPr sz="1200"/>
+              <a:defRPr sz="950"/>
             </a:lvl8pPr>
             <a:lvl9pPr>
-              <a:defRPr sz="1200"/>
+              <a:defRPr sz="950"/>
             </a:lvl9pPr>
           </a:lstStyle>
           <a:p>
@@ -1656,39 +1656,39 @@
           <a:lstStyle>
             <a:lvl1pPr marL="0" indent="0">
               <a:buNone/>
-              <a:defRPr sz="1800" b="1"/>
+              <a:defRPr sz="1400" b="1"/>
             </a:lvl1pPr>
             <a:lvl2pPr marL="342900" indent="0">
               <a:buNone/>
-              <a:defRPr sz="1500" b="1"/>
+              <a:defRPr sz="1150" b="1"/>
             </a:lvl2pPr>
             <a:lvl3pPr marL="685800" indent="0">
               <a:buNone/>
-              <a:defRPr sz="1350" b="1"/>
+              <a:defRPr sz="1050" b="1"/>
             </a:lvl3pPr>
             <a:lvl4pPr marL="1028700" indent="0">
               <a:buNone/>
-              <a:defRPr sz="1200" b="1"/>
+              <a:defRPr sz="950" b="1"/>
             </a:lvl4pPr>
             <a:lvl5pPr marL="1371600" indent="0">
               <a:buNone/>
-              <a:defRPr sz="1200" b="1"/>
+              <a:defRPr sz="950" b="1"/>
             </a:lvl5pPr>
             <a:lvl6pPr marL="1714500" indent="0">
               <a:buNone/>
-              <a:defRPr sz="1200" b="1"/>
+              <a:defRPr sz="950" b="1"/>
             </a:lvl6pPr>
             <a:lvl7pPr marL="2057400" indent="0">
               <a:buNone/>
-              <a:defRPr sz="1200" b="1"/>
+              <a:defRPr sz="950" b="1"/>
             </a:lvl7pPr>
             <a:lvl8pPr marL="2400300" indent="0">
               <a:buNone/>
-              <a:defRPr sz="1200" b="1"/>
+              <a:defRPr sz="950" b="1"/>
             </a:lvl8pPr>
             <a:lvl9pPr marL="2743200" indent="0">
               <a:buNone/>
-              <a:defRPr sz="1200" b="1"/>
+              <a:defRPr sz="950" b="1"/>
             </a:lvl9pPr>
           </a:lstStyle>
           <a:p>
@@ -1720,31 +1720,31 @@
           <a:bodyPr/>
           <a:lstStyle>
             <a:lvl1pPr>
-              <a:defRPr sz="1800"/>
+              <a:defRPr sz="1400"/>
             </a:lvl1pPr>
             <a:lvl2pPr>
-              <a:defRPr sz="1500"/>
+              <a:defRPr sz="1150"/>
             </a:lvl2pPr>
             <a:lvl3pPr>
-              <a:defRPr sz="1350"/>
+              <a:defRPr sz="1050"/>
             </a:lvl3pPr>
             <a:lvl4pPr>
-              <a:defRPr sz="1200"/>
+              <a:defRPr sz="950"/>
             </a:lvl4pPr>
             <a:lvl5pPr>
-              <a:defRPr sz="1200"/>
+              <a:defRPr sz="950"/>
             </a:lvl5pPr>
             <a:lvl6pPr>
-              <a:defRPr sz="1200"/>
+              <a:defRPr sz="950"/>
             </a:lvl6pPr>
             <a:lvl7pPr>
-              <a:defRPr sz="1200"/>
+              <a:defRPr sz="950"/>
             </a:lvl7pPr>
             <a:lvl8pPr>
-              <a:defRPr sz="1200"/>
+              <a:defRPr sz="950"/>
             </a:lvl8pPr>
             <a:lvl9pPr>
-              <a:defRPr sz="1200"/>
+              <a:defRPr sz="950"/>
             </a:lvl9pPr>
           </a:lstStyle>
           <a:p>
@@ -2111,7 +2111,7 @@
           <a:bodyPr anchor="b"/>
           <a:lstStyle>
             <a:lvl1pPr algn="l">
-              <a:defRPr sz="1500" b="1"/>
+              <a:defRPr sz="1150" b="1"/>
             </a:lvl1pPr>
           </a:lstStyle>
           <a:p>
@@ -2142,31 +2142,31 @@
           <a:bodyPr/>
           <a:lstStyle>
             <a:lvl1pPr>
-              <a:defRPr sz="2400"/>
+              <a:defRPr sz="1850"/>
             </a:lvl1pPr>
             <a:lvl2pPr>
-              <a:defRPr sz="2100"/>
+              <a:defRPr sz="1650"/>
             </a:lvl2pPr>
             <a:lvl3pPr>
-              <a:defRPr sz="1800"/>
+              <a:defRPr sz="1400"/>
             </a:lvl3pPr>
             <a:lvl4pPr>
-              <a:defRPr sz="1500"/>
+              <a:defRPr sz="1150"/>
             </a:lvl4pPr>
             <a:lvl5pPr>
-              <a:defRPr sz="1500"/>
+              <a:defRPr sz="1150"/>
             </a:lvl5pPr>
             <a:lvl6pPr>
-              <a:defRPr sz="1500"/>
+              <a:defRPr sz="1150"/>
             </a:lvl6pPr>
             <a:lvl7pPr>
-              <a:defRPr sz="1500"/>
+              <a:defRPr sz="1150"/>
             </a:lvl7pPr>
             <a:lvl8pPr>
-              <a:defRPr sz="1500"/>
+              <a:defRPr sz="1150"/>
             </a:lvl8pPr>
             <a:lvl9pPr>
-              <a:defRPr sz="1500"/>
+              <a:defRPr sz="1150"/>
             </a:lvl9pPr>
           </a:lstStyle>
           <a:p>
@@ -2227,39 +2227,39 @@
           <a:lstStyle>
             <a:lvl1pPr marL="0" indent="0">
               <a:buNone/>
-              <a:defRPr sz="1050"/>
+              <a:defRPr sz="800"/>
             </a:lvl1pPr>
             <a:lvl2pPr marL="342900" indent="0">
               <a:buNone/>
-              <a:defRPr sz="900"/>
+              <a:defRPr sz="700"/>
             </a:lvl2pPr>
             <a:lvl3pPr marL="685800" indent="0">
               <a:buNone/>
-              <a:defRPr sz="750"/>
+              <a:defRPr sz="700"/>
             </a:lvl3pPr>
             <a:lvl4pPr marL="1028700" indent="0">
               <a:buNone/>
-              <a:defRPr sz="675"/>
+              <a:defRPr sz="700"/>
             </a:lvl4pPr>
             <a:lvl5pPr marL="1371600" indent="0">
               <a:buNone/>
-              <a:defRPr sz="675"/>
+              <a:defRPr sz="700"/>
             </a:lvl5pPr>
             <a:lvl6pPr marL="1714500" indent="0">
               <a:buNone/>
-              <a:defRPr sz="675"/>
+              <a:defRPr sz="700"/>
             </a:lvl6pPr>
             <a:lvl7pPr marL="2057400" indent="0">
               <a:buNone/>
-              <a:defRPr sz="675"/>
+              <a:defRPr sz="700"/>
             </a:lvl7pPr>
             <a:lvl8pPr marL="2400300" indent="0">
               <a:buNone/>
-              <a:defRPr sz="675"/>
+              <a:defRPr sz="700"/>
             </a:lvl8pPr>
             <a:lvl9pPr marL="2743200" indent="0">
               <a:buNone/>
-              <a:defRPr sz="675"/>
+              <a:defRPr sz="700"/>
             </a:lvl9pPr>
           </a:lstStyle>
           <a:p>
@@ -2386,7 +2386,7 @@
           <a:bodyPr anchor="b"/>
           <a:lstStyle>
             <a:lvl1pPr algn="l">
-              <a:defRPr sz="1500" b="1"/>
+              <a:defRPr sz="1150" b="1"/>
             </a:lvl1pPr>
           </a:lstStyle>
           <a:p>
@@ -2418,39 +2418,39 @@
           <a:lstStyle>
             <a:lvl1pPr marL="0" indent="0">
               <a:buNone/>
-              <a:defRPr sz="2400"/>
+              <a:defRPr sz="1850"/>
             </a:lvl1pPr>
             <a:lvl2pPr marL="342900" indent="0">
               <a:buNone/>
-              <a:defRPr sz="2100"/>
+              <a:defRPr sz="1650"/>
             </a:lvl2pPr>
             <a:lvl3pPr marL="685800" indent="0">
               <a:buNone/>
-              <a:defRPr sz="1800"/>
+              <a:defRPr sz="1400"/>
             </a:lvl3pPr>
             <a:lvl4pPr marL="1028700" indent="0">
               <a:buNone/>
-              <a:defRPr sz="1500"/>
+              <a:defRPr sz="1150"/>
             </a:lvl4pPr>
             <a:lvl5pPr marL="1371600" indent="0">
               <a:buNone/>
-              <a:defRPr sz="1500"/>
+              <a:defRPr sz="1150"/>
             </a:lvl5pPr>
             <a:lvl6pPr marL="1714500" indent="0">
               <a:buNone/>
-              <a:defRPr sz="1500"/>
+              <a:defRPr sz="1150"/>
             </a:lvl6pPr>
             <a:lvl7pPr marL="2057400" indent="0">
               <a:buNone/>
-              <a:defRPr sz="1500"/>
+              <a:defRPr sz="1150"/>
             </a:lvl7pPr>
             <a:lvl8pPr marL="2400300" indent="0">
               <a:buNone/>
-              <a:defRPr sz="1500"/>
+              <a:defRPr sz="1150"/>
             </a:lvl8pPr>
             <a:lvl9pPr marL="2743200" indent="0">
               <a:buNone/>
-              <a:defRPr sz="1500"/>
+              <a:defRPr sz="1150"/>
             </a:lvl9pPr>
           </a:lstStyle>
           <a:p>
@@ -2479,39 +2479,39 @@
           <a:lstStyle>
             <a:lvl1pPr marL="0" indent="0">
               <a:buNone/>
-              <a:defRPr sz="1050"/>
+              <a:defRPr sz="800"/>
             </a:lvl1pPr>
             <a:lvl2pPr marL="342900" indent="0">
               <a:buNone/>
-              <a:defRPr sz="900"/>
+              <a:defRPr sz="700"/>
             </a:lvl2pPr>
             <a:lvl3pPr marL="685800" indent="0">
               <a:buNone/>
-              <a:defRPr sz="750"/>
+              <a:defRPr sz="700"/>
             </a:lvl3pPr>
             <a:lvl4pPr marL="1028700" indent="0">
               <a:buNone/>
-              <a:defRPr sz="675"/>
+              <a:defRPr sz="700"/>
             </a:lvl4pPr>
             <a:lvl5pPr marL="1371600" indent="0">
               <a:buNone/>
-              <a:defRPr sz="675"/>
+              <a:defRPr sz="700"/>
             </a:lvl5pPr>
             <a:lvl6pPr marL="1714500" indent="0">
               <a:buNone/>
-              <a:defRPr sz="675"/>
+              <a:defRPr sz="700"/>
             </a:lvl6pPr>
             <a:lvl7pPr marL="2057400" indent="0">
               <a:buNone/>
-              <a:defRPr sz="675"/>
+              <a:defRPr sz="700"/>
             </a:lvl7pPr>
             <a:lvl8pPr marL="2400300" indent="0">
               <a:buNone/>
-              <a:defRPr sz="675"/>
+              <a:defRPr sz="700"/>
             </a:lvl8pPr>
             <a:lvl9pPr marL="2743200" indent="0">
               <a:buNone/>
-              <a:defRPr sz="675"/>
+              <a:defRPr sz="700"/>
             </a:lvl9pPr>
           </a:lstStyle>
           <a:p>
@@ -2739,7 +2739,7 @@
           <a:bodyPr anchor="ctr" bIns="45720" lIns="91440" rIns="91440" rtlCol="0" tIns="45720" vert="horz"/>
           <a:lstStyle>
             <a:lvl1pPr algn="l">
-              <a:defRPr sz="900">
+              <a:defRPr sz="700">
                 <a:solidFill>
                   <a:schemeClr val="tx1">
                     <a:tint val="75000"/>
@@ -2780,7 +2780,7 @@
           <a:bodyPr anchor="ctr" bIns="45720" lIns="91440" rIns="91440" rtlCol="0" tIns="45720" vert="horz"/>
           <a:lstStyle>
             <a:lvl1pPr algn="ctr">
-              <a:defRPr sz="900">
+              <a:defRPr sz="700">
                 <a:solidFill>
                   <a:schemeClr val="tx1">
                     <a:tint val="75000"/>
@@ -2817,7 +2817,7 @@
           <a:bodyPr anchor="ctr" bIns="45720" lIns="91440" rIns="91440" rtlCol="0" tIns="45720" vert="horz"/>
           <a:lstStyle>
             <a:lvl1pPr algn="r">
-              <a:defRPr sz="900">
+              <a:defRPr sz="700">
                 <a:solidFill>
                   <a:schemeClr val="tx1">
                     <a:tint val="75000"/>
@@ -2863,7 +2863,7 @@
           <a:spcPct val="0"/>
         </a:spcBef>
         <a:buNone/>
-        <a:defRPr kern="1200" sz="3300">
+        <a:defRPr kern="1200" sz="2550">
           <a:solidFill>
             <a:schemeClr val="tx1"/>
           </a:solidFill>
@@ -2880,7 +2880,7 @@
         </a:spcBef>
         <a:buFont typeface="Arial"/>
         <a:buChar char="•"/>
-        <a:defRPr kern="1200" sz="2400">
+        <a:defRPr kern="1200" sz="1850">
           <a:solidFill>
             <a:schemeClr val="tx1"/>
           </a:solidFill>
@@ -2895,7 +2895,7 @@
         </a:spcBef>
         <a:buFont typeface="Arial"/>
         <a:buChar char="–"/>
-        <a:defRPr kern="1200" sz="2100">
+        <a:defRPr kern="1200" sz="1650">
           <a:solidFill>
             <a:schemeClr val="tx1"/>
           </a:solidFill>
@@ -2910,7 +2910,7 @@
         </a:spcBef>
         <a:buFont typeface="Arial"/>
         <a:buChar char="•"/>
-        <a:defRPr kern="1200" sz="1800">
+        <a:defRPr kern="1200" sz="1400">
           <a:solidFill>
             <a:schemeClr val="tx1"/>
           </a:solidFill>
@@ -2925,7 +2925,7 @@
         </a:spcBef>
         <a:buFont typeface="Arial"/>
         <a:buChar char="–"/>
-        <a:defRPr kern="1200" sz="1500">
+        <a:defRPr kern="1200" sz="1150">
           <a:solidFill>
             <a:schemeClr val="tx1"/>
           </a:solidFill>
@@ -2940,7 +2940,7 @@
         </a:spcBef>
         <a:buFont typeface="Arial"/>
         <a:buChar char="»"/>
-        <a:defRPr kern="1200" sz="1500">
+        <a:defRPr kern="1200" sz="1150">
           <a:solidFill>
             <a:schemeClr val="tx1"/>
           </a:solidFill>
@@ -2955,7 +2955,7 @@
         </a:spcBef>
         <a:buFont typeface="Arial"/>
         <a:buChar char="•"/>
-        <a:defRPr kern="1200" sz="1500">
+        <a:defRPr kern="1200" sz="1150">
           <a:solidFill>
             <a:schemeClr val="tx1"/>
           </a:solidFill>
@@ -2970,7 +2970,7 @@
         </a:spcBef>
         <a:buFont typeface="Arial"/>
         <a:buChar char="•"/>
-        <a:defRPr kern="1200" sz="1500">
+        <a:defRPr kern="1200" sz="1150">
           <a:solidFill>
             <a:schemeClr val="tx1"/>
           </a:solidFill>
@@ -2985,7 +2985,7 @@
         </a:spcBef>
         <a:buFont typeface="Arial"/>
         <a:buChar char="•"/>
-        <a:defRPr kern="1200" sz="1500">
+        <a:defRPr kern="1200" sz="1150">
           <a:solidFill>
             <a:schemeClr val="tx1"/>
           </a:solidFill>
@@ -3000,7 +3000,7 @@
         </a:spcBef>
         <a:buFont typeface="Arial"/>
         <a:buChar char="•"/>
-        <a:defRPr kern="1200" sz="1500">
+        <a:defRPr kern="1200" sz="1150">
           <a:solidFill>
             <a:schemeClr val="tx1"/>
           </a:solidFill>
@@ -3015,7 +3015,7 @@
         <a:defRPr lang="en-US"/>
       </a:defPPr>
       <a:lvl1pPr algn="l" defTabSz="342900" eaLnBrk="1" hangingPunct="1" latinLnBrk="0" marL="0" rtl="0">
-        <a:defRPr kern="1200" sz="1350">
+        <a:defRPr kern="1200" sz="1050">
           <a:solidFill>
             <a:schemeClr val="tx1"/>
           </a:solidFill>
@@ -3025,7 +3025,7 @@
         </a:defRPr>
       </a:lvl1pPr>
       <a:lvl2pPr algn="l" defTabSz="342900" eaLnBrk="1" hangingPunct="1" latinLnBrk="0" marL="342900" rtl="0">
-        <a:defRPr kern="1200" sz="1350">
+        <a:defRPr kern="1200" sz="1050">
           <a:solidFill>
             <a:schemeClr val="tx1"/>
           </a:solidFill>
@@ -3035,7 +3035,7 @@
         </a:defRPr>
       </a:lvl2pPr>
       <a:lvl3pPr algn="l" defTabSz="342900" eaLnBrk="1" hangingPunct="1" latinLnBrk="0" marL="685800" rtl="0">
-        <a:defRPr kern="1200" sz="1350">
+        <a:defRPr kern="1200" sz="1050">
           <a:solidFill>
             <a:schemeClr val="tx1"/>
           </a:solidFill>
@@ -3045,7 +3045,7 @@
         </a:defRPr>
       </a:lvl3pPr>
       <a:lvl4pPr algn="l" defTabSz="342900" eaLnBrk="1" hangingPunct="1" latinLnBrk="0" marL="1028700" rtl="0">
-        <a:defRPr kern="1200" sz="1350">
+        <a:defRPr kern="1200" sz="1050">
           <a:solidFill>
             <a:schemeClr val="tx1"/>
           </a:solidFill>
@@ -3055,7 +3055,7 @@
         </a:defRPr>
       </a:lvl4pPr>
       <a:lvl5pPr algn="l" defTabSz="342900" eaLnBrk="1" hangingPunct="1" latinLnBrk="0" marL="1371600" rtl="0">
-        <a:defRPr kern="1200" sz="1350">
+        <a:defRPr kern="1200" sz="1050">
           <a:solidFill>
             <a:schemeClr val="tx1"/>
           </a:solidFill>
@@ -3065,7 +3065,7 @@
         </a:defRPr>
       </a:lvl5pPr>
       <a:lvl6pPr algn="l" defTabSz="342900" eaLnBrk="1" hangingPunct="1" latinLnBrk="0" marL="1714500" rtl="0">
-        <a:defRPr kern="1200" sz="1350">
+        <a:defRPr kern="1200" sz="1050">
           <a:solidFill>
             <a:schemeClr val="tx1"/>
           </a:solidFill>
@@ -3075,7 +3075,7 @@
         </a:defRPr>
       </a:lvl6pPr>
       <a:lvl7pPr algn="l" defTabSz="342900" eaLnBrk="1" hangingPunct="1" latinLnBrk="0" marL="2057400" rtl="0">
-        <a:defRPr kern="1200" sz="1350">
+        <a:defRPr kern="1200" sz="1050">
           <a:solidFill>
             <a:schemeClr val="tx1"/>
           </a:solidFill>
@@ -3085,7 +3085,7 @@
         </a:defRPr>
       </a:lvl7pPr>
       <a:lvl8pPr algn="l" defTabSz="342900" eaLnBrk="1" hangingPunct="1" latinLnBrk="0" marL="2400300" rtl="0">
-        <a:defRPr kern="1200" sz="1350">
+        <a:defRPr kern="1200" sz="1050">
           <a:solidFill>
             <a:schemeClr val="tx1"/>
           </a:solidFill>
@@ -3095,7 +3095,7 @@
         </a:defRPr>
       </a:lvl8pPr>
       <a:lvl9pPr algn="l" defTabSz="342900" eaLnBrk="1" hangingPunct="1" latinLnBrk="0" marL="2743200" rtl="0">
-        <a:defRPr kern="1200" sz="1350">
+        <a:defRPr kern="1200" sz="1050">
           <a:solidFill>
             <a:schemeClr val="tx1"/>
           </a:solidFill>

--- a/05-ridge-lasso-elastic-net/slides.pptx
+++ b/05-ridge-lasso-elastic-net/slides.pptx
@@ -950,7 +950,7 @@
           <a:bodyPr anchor="t"/>
           <a:lstStyle>
             <a:lvl1pPr algn="l">
-              <a:defRPr sz="2350" b="1" cap="all"/>
+              <a:defRPr sz="1850" b="1" cap="all"/>
             </a:lvl1pPr>
           </a:lstStyle>
           <a:p>
@@ -982,7 +982,7 @@
           <a:lstStyle>
             <a:lvl1pPr marL="0" indent="0">
               <a:buNone/>
-              <a:defRPr sz="1150">
+              <a:defRPr sz="950">
                 <a:solidFill>
                   <a:schemeClr val="tx1">
                     <a:tint val="75000"/>
@@ -992,7 +992,7 @@
             </a:lvl1pPr>
             <a:lvl2pPr marL="342900" indent="0">
               <a:buNone/>
-              <a:defRPr sz="1050">
+              <a:defRPr sz="850">
                 <a:solidFill>
                   <a:schemeClr val="tx1">
                     <a:tint val="75000"/>
@@ -1002,7 +1002,7 @@
             </a:lvl2pPr>
             <a:lvl3pPr marL="685800" indent="0">
               <a:buNone/>
-              <a:defRPr sz="950">
+              <a:defRPr sz="750">
                 <a:solidFill>
                   <a:schemeClr val="tx1">
                     <a:tint val="75000"/>
@@ -1012,7 +1012,7 @@
             </a:lvl3pPr>
             <a:lvl4pPr marL="1028700" indent="0">
               <a:buNone/>
-              <a:defRPr sz="800">
+              <a:defRPr sz="650">
                 <a:solidFill>
                   <a:schemeClr val="tx1">
                     <a:tint val="75000"/>
@@ -1022,7 +1022,7 @@
             </a:lvl4pPr>
             <a:lvl5pPr marL="1371600" indent="0">
               <a:buNone/>
-              <a:defRPr sz="800">
+              <a:defRPr sz="650">
                 <a:solidFill>
                   <a:schemeClr val="tx1">
                     <a:tint val="75000"/>
@@ -1032,7 +1032,7 @@
             </a:lvl5pPr>
             <a:lvl6pPr marL="1714500" indent="0">
               <a:buNone/>
-              <a:defRPr sz="800">
+              <a:defRPr sz="650">
                 <a:solidFill>
                   <a:schemeClr val="tx1">
                     <a:tint val="75000"/>
@@ -1042,7 +1042,7 @@
             </a:lvl6pPr>
             <a:lvl7pPr marL="2057400" indent="0">
               <a:buNone/>
-              <a:defRPr sz="800">
+              <a:defRPr sz="650">
                 <a:solidFill>
                   <a:schemeClr val="tx1">
                     <a:tint val="75000"/>
@@ -1052,7 +1052,7 @@
             </a:lvl7pPr>
             <a:lvl8pPr marL="2400300" indent="0">
               <a:buNone/>
-              <a:defRPr sz="800">
+              <a:defRPr sz="650">
                 <a:solidFill>
                   <a:schemeClr val="tx1">
                     <a:tint val="75000"/>
@@ -1062,7 +1062,7 @@
             </a:lvl8pPr>
             <a:lvl9pPr marL="2743200" indent="0">
               <a:buNone/>
-              <a:defRPr sz="800">
+              <a:defRPr sz="650">
                 <a:solidFill>
                   <a:schemeClr val="tx1">
                     <a:tint val="75000"/>
@@ -1217,31 +1217,31 @@
           <a:bodyPr/>
           <a:lstStyle>
             <a:lvl1pPr>
-              <a:defRPr sz="1650"/>
+              <a:defRPr sz="1300"/>
             </a:lvl1pPr>
             <a:lvl2pPr>
-              <a:defRPr sz="1400"/>
+              <a:defRPr sz="1100"/>
             </a:lvl2pPr>
             <a:lvl3pPr>
-              <a:defRPr sz="1150"/>
+              <a:defRPr sz="950"/>
             </a:lvl3pPr>
             <a:lvl4pPr>
-              <a:defRPr sz="1050"/>
+              <a:defRPr sz="850"/>
             </a:lvl4pPr>
             <a:lvl5pPr>
-              <a:defRPr sz="1050"/>
+              <a:defRPr sz="850"/>
             </a:lvl5pPr>
             <a:lvl6pPr>
-              <a:defRPr sz="1050"/>
+              <a:defRPr sz="850"/>
             </a:lvl6pPr>
             <a:lvl7pPr>
-              <a:defRPr sz="1050"/>
+              <a:defRPr sz="850"/>
             </a:lvl7pPr>
             <a:lvl8pPr>
-              <a:defRPr sz="1050"/>
+              <a:defRPr sz="850"/>
             </a:lvl8pPr>
             <a:lvl9pPr>
-              <a:defRPr sz="1050"/>
+              <a:defRPr sz="850"/>
             </a:lvl9pPr>
           </a:lstStyle>
           <a:p>
@@ -1301,31 +1301,31 @@
           <a:bodyPr/>
           <a:lstStyle>
             <a:lvl1pPr>
-              <a:defRPr sz="1650"/>
+              <a:defRPr sz="1300"/>
             </a:lvl1pPr>
             <a:lvl2pPr>
-              <a:defRPr sz="1400"/>
+              <a:defRPr sz="1100"/>
             </a:lvl2pPr>
             <a:lvl3pPr>
-              <a:defRPr sz="1150"/>
+              <a:defRPr sz="950"/>
             </a:lvl3pPr>
             <a:lvl4pPr>
-              <a:defRPr sz="1050"/>
+              <a:defRPr sz="850"/>
             </a:lvl4pPr>
             <a:lvl5pPr>
-              <a:defRPr sz="1050"/>
+              <a:defRPr sz="850"/>
             </a:lvl5pPr>
             <a:lvl6pPr>
-              <a:defRPr sz="1050"/>
+              <a:defRPr sz="850"/>
             </a:lvl6pPr>
             <a:lvl7pPr>
-              <a:defRPr sz="1050"/>
+              <a:defRPr sz="850"/>
             </a:lvl7pPr>
             <a:lvl8pPr>
-              <a:defRPr sz="1050"/>
+              <a:defRPr sz="850"/>
             </a:lvl8pPr>
             <a:lvl9pPr>
-              <a:defRPr sz="1050"/>
+              <a:defRPr sz="850"/>
             </a:lvl9pPr>
           </a:lstStyle>
           <a:p>
@@ -1507,39 +1507,39 @@
           <a:lstStyle>
             <a:lvl1pPr marL="0" indent="0">
               <a:buNone/>
-              <a:defRPr sz="1400" b="1"/>
+              <a:defRPr sz="1100" b="1"/>
             </a:lvl1pPr>
             <a:lvl2pPr marL="342900" indent="0">
               <a:buNone/>
-              <a:defRPr sz="1150" b="1"/>
+              <a:defRPr sz="950" b="1"/>
             </a:lvl2pPr>
             <a:lvl3pPr marL="685800" indent="0">
               <a:buNone/>
-              <a:defRPr sz="1050" b="1"/>
+              <a:defRPr sz="850" b="1"/>
             </a:lvl3pPr>
             <a:lvl4pPr marL="1028700" indent="0">
               <a:buNone/>
-              <a:defRPr sz="950" b="1"/>
+              <a:defRPr sz="750" b="1"/>
             </a:lvl4pPr>
             <a:lvl5pPr marL="1371600" indent="0">
               <a:buNone/>
-              <a:defRPr sz="950" b="1"/>
+              <a:defRPr sz="750" b="1"/>
             </a:lvl5pPr>
             <a:lvl6pPr marL="1714500" indent="0">
               <a:buNone/>
-              <a:defRPr sz="950" b="1"/>
+              <a:defRPr sz="750" b="1"/>
             </a:lvl6pPr>
             <a:lvl7pPr marL="2057400" indent="0">
               <a:buNone/>
-              <a:defRPr sz="950" b="1"/>
+              <a:defRPr sz="750" b="1"/>
             </a:lvl7pPr>
             <a:lvl8pPr marL="2400300" indent="0">
               <a:buNone/>
-              <a:defRPr sz="950" b="1"/>
+              <a:defRPr sz="750" b="1"/>
             </a:lvl8pPr>
             <a:lvl9pPr marL="2743200" indent="0">
               <a:buNone/>
-              <a:defRPr sz="950" b="1"/>
+              <a:defRPr sz="750" b="1"/>
             </a:lvl9pPr>
           </a:lstStyle>
           <a:p>
@@ -1571,31 +1571,31 @@
           <a:bodyPr/>
           <a:lstStyle>
             <a:lvl1pPr>
-              <a:defRPr sz="1400"/>
+              <a:defRPr sz="1100"/>
             </a:lvl1pPr>
             <a:lvl2pPr>
-              <a:defRPr sz="1150"/>
+              <a:defRPr sz="950"/>
             </a:lvl2pPr>
             <a:lvl3pPr>
-              <a:defRPr sz="1050"/>
+              <a:defRPr sz="850"/>
             </a:lvl3pPr>
             <a:lvl4pPr>
-              <a:defRPr sz="950"/>
+              <a:defRPr sz="750"/>
             </a:lvl4pPr>
             <a:lvl5pPr>
-              <a:defRPr sz="950"/>
+              <a:defRPr sz="750"/>
             </a:lvl5pPr>
             <a:lvl6pPr>
-              <a:defRPr sz="950"/>
+              <a:defRPr sz="750"/>
             </a:lvl6pPr>
             <a:lvl7pPr>
-              <a:defRPr sz="950"/>
+              <a:defRPr sz="750"/>
             </a:lvl7pPr>
             <a:lvl8pPr>
-              <a:defRPr sz="950"/>
+              <a:defRPr sz="750"/>
             </a:lvl8pPr>
             <a:lvl9pPr>
-              <a:defRPr sz="950"/>
+              <a:defRPr sz="750"/>
             </a:lvl9pPr>
           </a:lstStyle>
           <a:p>
@@ -1656,39 +1656,39 @@
           <a:lstStyle>
             <a:lvl1pPr marL="0" indent="0">
               <a:buNone/>
-              <a:defRPr sz="1400" b="1"/>
+              <a:defRPr sz="1100" b="1"/>
             </a:lvl1pPr>
             <a:lvl2pPr marL="342900" indent="0">
               <a:buNone/>
-              <a:defRPr sz="1150" b="1"/>
+              <a:defRPr sz="950" b="1"/>
             </a:lvl2pPr>
             <a:lvl3pPr marL="685800" indent="0">
               <a:buNone/>
-              <a:defRPr sz="1050" b="1"/>
+              <a:defRPr sz="850" b="1"/>
             </a:lvl3pPr>
             <a:lvl4pPr marL="1028700" indent="0">
               <a:buNone/>
-              <a:defRPr sz="950" b="1"/>
+              <a:defRPr sz="750" b="1"/>
             </a:lvl4pPr>
             <a:lvl5pPr marL="1371600" indent="0">
               <a:buNone/>
-              <a:defRPr sz="950" b="1"/>
+              <a:defRPr sz="750" b="1"/>
             </a:lvl5pPr>
             <a:lvl6pPr marL="1714500" indent="0">
               <a:buNone/>
-              <a:defRPr sz="950" b="1"/>
+              <a:defRPr sz="750" b="1"/>
             </a:lvl6pPr>
             <a:lvl7pPr marL="2057400" indent="0">
               <a:buNone/>
-              <a:defRPr sz="950" b="1"/>
+              <a:defRPr sz="750" b="1"/>
             </a:lvl7pPr>
             <a:lvl8pPr marL="2400300" indent="0">
               <a:buNone/>
-              <a:defRPr sz="950" b="1"/>
+              <a:defRPr sz="750" b="1"/>
             </a:lvl8pPr>
             <a:lvl9pPr marL="2743200" indent="0">
               <a:buNone/>
-              <a:defRPr sz="950" b="1"/>
+              <a:defRPr sz="750" b="1"/>
             </a:lvl9pPr>
           </a:lstStyle>
           <a:p>
@@ -1720,31 +1720,31 @@
           <a:bodyPr/>
           <a:lstStyle>
             <a:lvl1pPr>
-              <a:defRPr sz="1400"/>
+              <a:defRPr sz="1100"/>
             </a:lvl1pPr>
             <a:lvl2pPr>
-              <a:defRPr sz="1150"/>
+              <a:defRPr sz="950"/>
             </a:lvl2pPr>
             <a:lvl3pPr>
-              <a:defRPr sz="1050"/>
+              <a:defRPr sz="850"/>
             </a:lvl3pPr>
             <a:lvl4pPr>
-              <a:defRPr sz="950"/>
+              <a:defRPr sz="750"/>
             </a:lvl4pPr>
             <a:lvl5pPr>
-              <a:defRPr sz="950"/>
+              <a:defRPr sz="750"/>
             </a:lvl5pPr>
             <a:lvl6pPr>
-              <a:defRPr sz="950"/>
+              <a:defRPr sz="750"/>
             </a:lvl6pPr>
             <a:lvl7pPr>
-              <a:defRPr sz="950"/>
+              <a:defRPr sz="750"/>
             </a:lvl7pPr>
             <a:lvl8pPr>
-              <a:defRPr sz="950"/>
+              <a:defRPr sz="750"/>
             </a:lvl8pPr>
             <a:lvl9pPr>
-              <a:defRPr sz="950"/>
+              <a:defRPr sz="750"/>
             </a:lvl9pPr>
           </a:lstStyle>
           <a:p>
@@ -2111,7 +2111,7 @@
           <a:bodyPr anchor="b"/>
           <a:lstStyle>
             <a:lvl1pPr algn="l">
-              <a:defRPr sz="1150" b="1"/>
+              <a:defRPr sz="950" b="1"/>
             </a:lvl1pPr>
           </a:lstStyle>
           <a:p>
@@ -2142,31 +2142,31 @@
           <a:bodyPr/>
           <a:lstStyle>
             <a:lvl1pPr>
-              <a:defRPr sz="1850"/>
+              <a:defRPr sz="1500"/>
             </a:lvl1pPr>
             <a:lvl2pPr>
-              <a:defRPr sz="1650"/>
+              <a:defRPr sz="1300"/>
             </a:lvl2pPr>
             <a:lvl3pPr>
-              <a:defRPr sz="1400"/>
+              <a:defRPr sz="1100"/>
             </a:lvl3pPr>
             <a:lvl4pPr>
-              <a:defRPr sz="1150"/>
+              <a:defRPr sz="950"/>
             </a:lvl4pPr>
             <a:lvl5pPr>
-              <a:defRPr sz="1150"/>
+              <a:defRPr sz="950"/>
             </a:lvl5pPr>
             <a:lvl6pPr>
-              <a:defRPr sz="1150"/>
+              <a:defRPr sz="950"/>
             </a:lvl6pPr>
             <a:lvl7pPr>
-              <a:defRPr sz="1150"/>
+              <a:defRPr sz="950"/>
             </a:lvl7pPr>
             <a:lvl8pPr>
-              <a:defRPr sz="1150"/>
+              <a:defRPr sz="950"/>
             </a:lvl8pPr>
             <a:lvl9pPr>
-              <a:defRPr sz="1150"/>
+              <a:defRPr sz="950"/>
             </a:lvl9pPr>
           </a:lstStyle>
           <a:p>
@@ -2227,39 +2227,39 @@
           <a:lstStyle>
             <a:lvl1pPr marL="0" indent="0">
               <a:buNone/>
-              <a:defRPr sz="800"/>
+              <a:defRPr sz="650"/>
             </a:lvl1pPr>
             <a:lvl2pPr marL="342900" indent="0">
               <a:buNone/>
-              <a:defRPr sz="700"/>
+              <a:defRPr sz="550"/>
             </a:lvl2pPr>
             <a:lvl3pPr marL="685800" indent="0">
               <a:buNone/>
-              <a:defRPr sz="700"/>
+              <a:defRPr sz="550"/>
             </a:lvl3pPr>
             <a:lvl4pPr marL="1028700" indent="0">
               <a:buNone/>
-              <a:defRPr sz="700"/>
+              <a:defRPr sz="550"/>
             </a:lvl4pPr>
             <a:lvl5pPr marL="1371600" indent="0">
               <a:buNone/>
-              <a:defRPr sz="700"/>
+              <a:defRPr sz="550"/>
             </a:lvl5pPr>
             <a:lvl6pPr marL="1714500" indent="0">
               <a:buNone/>
-              <a:defRPr sz="700"/>
+              <a:defRPr sz="550"/>
             </a:lvl6pPr>
             <a:lvl7pPr marL="2057400" indent="0">
               <a:buNone/>
-              <a:defRPr sz="700"/>
+              <a:defRPr sz="550"/>
             </a:lvl7pPr>
             <a:lvl8pPr marL="2400300" indent="0">
               <a:buNone/>
-              <a:defRPr sz="700"/>
+              <a:defRPr sz="550"/>
             </a:lvl8pPr>
             <a:lvl9pPr marL="2743200" indent="0">
               <a:buNone/>
-              <a:defRPr sz="700"/>
+              <a:defRPr sz="550"/>
             </a:lvl9pPr>
           </a:lstStyle>
           <a:p>
@@ -2386,7 +2386,7 @@
           <a:bodyPr anchor="b"/>
           <a:lstStyle>
             <a:lvl1pPr algn="l">
-              <a:defRPr sz="1150" b="1"/>
+              <a:defRPr sz="950" b="1"/>
             </a:lvl1pPr>
           </a:lstStyle>
           <a:p>
@@ -2418,39 +2418,39 @@
           <a:lstStyle>
             <a:lvl1pPr marL="0" indent="0">
               <a:buNone/>
-              <a:defRPr sz="1850"/>
+              <a:defRPr sz="1500"/>
             </a:lvl1pPr>
             <a:lvl2pPr marL="342900" indent="0">
               <a:buNone/>
-              <a:defRPr sz="1650"/>
+              <a:defRPr sz="1300"/>
             </a:lvl2pPr>
             <a:lvl3pPr marL="685800" indent="0">
               <a:buNone/>
-              <a:defRPr sz="1400"/>
+              <a:defRPr sz="1100"/>
             </a:lvl3pPr>
             <a:lvl4pPr marL="1028700" indent="0">
               <a:buNone/>
-              <a:defRPr sz="1150"/>
+              <a:defRPr sz="950"/>
             </a:lvl4pPr>
             <a:lvl5pPr marL="1371600" indent="0">
               <a:buNone/>
-              <a:defRPr sz="1150"/>
+              <a:defRPr sz="950"/>
             </a:lvl5pPr>
             <a:lvl6pPr marL="1714500" indent="0">
               <a:buNone/>
-              <a:defRPr sz="1150"/>
+              <a:defRPr sz="950"/>
             </a:lvl6pPr>
             <a:lvl7pPr marL="2057400" indent="0">
               <a:buNone/>
-              <a:defRPr sz="1150"/>
+              <a:defRPr sz="950"/>
             </a:lvl7pPr>
             <a:lvl8pPr marL="2400300" indent="0">
               <a:buNone/>
-              <a:defRPr sz="1150"/>
+              <a:defRPr sz="950"/>
             </a:lvl8pPr>
             <a:lvl9pPr marL="2743200" indent="0">
               <a:buNone/>
-              <a:defRPr sz="1150"/>
+              <a:defRPr sz="950"/>
             </a:lvl9pPr>
           </a:lstStyle>
           <a:p>
@@ -2479,39 +2479,39 @@
           <a:lstStyle>
             <a:lvl1pPr marL="0" indent="0">
               <a:buNone/>
-              <a:defRPr sz="800"/>
+              <a:defRPr sz="650"/>
             </a:lvl1pPr>
             <a:lvl2pPr marL="342900" indent="0">
               <a:buNone/>
-              <a:defRPr sz="700"/>
+              <a:defRPr sz="550"/>
             </a:lvl2pPr>
             <a:lvl3pPr marL="685800" indent="0">
               <a:buNone/>
-              <a:defRPr sz="700"/>
+              <a:defRPr sz="550"/>
             </a:lvl3pPr>
             <a:lvl4pPr marL="1028700" indent="0">
               <a:buNone/>
-              <a:defRPr sz="700"/>
+              <a:defRPr sz="550"/>
             </a:lvl4pPr>
             <a:lvl5pPr marL="1371600" indent="0">
               <a:buNone/>
-              <a:defRPr sz="700"/>
+              <a:defRPr sz="550"/>
             </a:lvl5pPr>
             <a:lvl6pPr marL="1714500" indent="0">
               <a:buNone/>
-              <a:defRPr sz="700"/>
+              <a:defRPr sz="550"/>
             </a:lvl6pPr>
             <a:lvl7pPr marL="2057400" indent="0">
               <a:buNone/>
-              <a:defRPr sz="700"/>
+              <a:defRPr sz="550"/>
             </a:lvl7pPr>
             <a:lvl8pPr marL="2400300" indent="0">
               <a:buNone/>
-              <a:defRPr sz="700"/>
+              <a:defRPr sz="550"/>
             </a:lvl8pPr>
             <a:lvl9pPr marL="2743200" indent="0">
               <a:buNone/>
-              <a:defRPr sz="700"/>
+              <a:defRPr sz="550"/>
             </a:lvl9pPr>
           </a:lstStyle>
           <a:p>
@@ -2739,7 +2739,7 @@
           <a:bodyPr anchor="ctr" bIns="45720" lIns="91440" rIns="91440" rtlCol="0" tIns="45720" vert="horz"/>
           <a:lstStyle>
             <a:lvl1pPr algn="l">
-              <a:defRPr sz="700">
+              <a:defRPr sz="550">
                 <a:solidFill>
                   <a:schemeClr val="tx1">
                     <a:tint val="75000"/>
@@ -2780,7 +2780,7 @@
           <a:bodyPr anchor="ctr" bIns="45720" lIns="91440" rIns="91440" rtlCol="0" tIns="45720" vert="horz"/>
           <a:lstStyle>
             <a:lvl1pPr algn="ctr">
-              <a:defRPr sz="700">
+              <a:defRPr sz="550">
                 <a:solidFill>
                   <a:schemeClr val="tx1">
                     <a:tint val="75000"/>
@@ -2817,7 +2817,7 @@
           <a:bodyPr anchor="ctr" bIns="45720" lIns="91440" rIns="91440" rtlCol="0" tIns="45720" vert="horz"/>
           <a:lstStyle>
             <a:lvl1pPr algn="r">
-              <a:defRPr sz="700">
+              <a:defRPr sz="550">
                 <a:solidFill>
                   <a:schemeClr val="tx1">
                     <a:tint val="75000"/>
@@ -2863,7 +2863,7 @@
           <a:spcPct val="0"/>
         </a:spcBef>
         <a:buNone/>
-        <a:defRPr kern="1200" sz="2550">
+        <a:defRPr kern="1200" sz="2050">
           <a:solidFill>
             <a:schemeClr val="tx1"/>
           </a:solidFill>
@@ -2880,7 +2880,7 @@
         </a:spcBef>
         <a:buFont typeface="Arial"/>
         <a:buChar char="•"/>
-        <a:defRPr kern="1200" sz="1850">
+        <a:defRPr kern="1200" sz="1500">
           <a:solidFill>
             <a:schemeClr val="tx1"/>
           </a:solidFill>
@@ -2895,7 +2895,7 @@
         </a:spcBef>
         <a:buFont typeface="Arial"/>
         <a:buChar char="–"/>
-        <a:defRPr kern="1200" sz="1650">
+        <a:defRPr kern="1200" sz="1300">
           <a:solidFill>
             <a:schemeClr val="tx1"/>
           </a:solidFill>
@@ -2910,7 +2910,7 @@
         </a:spcBef>
         <a:buFont typeface="Arial"/>
         <a:buChar char="•"/>
-        <a:defRPr kern="1200" sz="1400">
+        <a:defRPr kern="1200" sz="1100">
           <a:solidFill>
             <a:schemeClr val="tx1"/>
           </a:solidFill>
@@ -2925,7 +2925,7 @@
         </a:spcBef>
         <a:buFont typeface="Arial"/>
         <a:buChar char="–"/>
-        <a:defRPr kern="1200" sz="1150">
+        <a:defRPr kern="1200" sz="950">
           <a:solidFill>
             <a:schemeClr val="tx1"/>
           </a:solidFill>
@@ -2940,7 +2940,7 @@
         </a:spcBef>
         <a:buFont typeface="Arial"/>
         <a:buChar char="»"/>
-        <a:defRPr kern="1200" sz="1150">
+        <a:defRPr kern="1200" sz="950">
           <a:solidFill>
             <a:schemeClr val="tx1"/>
           </a:solidFill>
@@ -2955,7 +2955,7 @@
         </a:spcBef>
         <a:buFont typeface="Arial"/>
         <a:buChar char="•"/>
-        <a:defRPr kern="1200" sz="1150">
+        <a:defRPr kern="1200" sz="950">
           <a:solidFill>
             <a:schemeClr val="tx1"/>
           </a:solidFill>
@@ -2970,7 +2970,7 @@
         </a:spcBef>
         <a:buFont typeface="Arial"/>
         <a:buChar char="•"/>
-        <a:defRPr kern="1200" sz="1150">
+        <a:defRPr kern="1200" sz="950">
           <a:solidFill>
             <a:schemeClr val="tx1"/>
           </a:solidFill>
@@ -2985,7 +2985,7 @@
         </a:spcBef>
         <a:buFont typeface="Arial"/>
         <a:buChar char="•"/>
-        <a:defRPr kern="1200" sz="1150">
+        <a:defRPr kern="1200" sz="950">
           <a:solidFill>
             <a:schemeClr val="tx1"/>
           </a:solidFill>
@@ -3000,7 +3000,7 @@
         </a:spcBef>
         <a:buFont typeface="Arial"/>
         <a:buChar char="•"/>
-        <a:defRPr kern="1200" sz="1150">
+        <a:defRPr kern="1200" sz="950">
           <a:solidFill>
             <a:schemeClr val="tx1"/>
           </a:solidFill>
@@ -3015,7 +3015,7 @@
         <a:defRPr lang="en-US"/>
       </a:defPPr>
       <a:lvl1pPr algn="l" defTabSz="342900" eaLnBrk="1" hangingPunct="1" latinLnBrk="0" marL="0" rtl="0">
-        <a:defRPr kern="1200" sz="1050">
+        <a:defRPr kern="1200" sz="850">
           <a:solidFill>
             <a:schemeClr val="tx1"/>
           </a:solidFill>
@@ -3025,7 +3025,7 @@
         </a:defRPr>
       </a:lvl1pPr>
       <a:lvl2pPr algn="l" defTabSz="342900" eaLnBrk="1" hangingPunct="1" latinLnBrk="0" marL="342900" rtl="0">
-        <a:defRPr kern="1200" sz="1050">
+        <a:defRPr kern="1200" sz="850">
           <a:solidFill>
             <a:schemeClr val="tx1"/>
           </a:solidFill>
@@ -3035,7 +3035,7 @@
         </a:defRPr>
       </a:lvl2pPr>
       <a:lvl3pPr algn="l" defTabSz="342900" eaLnBrk="1" hangingPunct="1" latinLnBrk="0" marL="685800" rtl="0">
-        <a:defRPr kern="1200" sz="1050">
+        <a:defRPr kern="1200" sz="850">
           <a:solidFill>
             <a:schemeClr val="tx1"/>
           </a:solidFill>
@@ -3045,7 +3045,7 @@
         </a:defRPr>
       </a:lvl3pPr>
       <a:lvl4pPr algn="l" defTabSz="342900" eaLnBrk="1" hangingPunct="1" latinLnBrk="0" marL="1028700" rtl="0">
-        <a:defRPr kern="1200" sz="1050">
+        <a:defRPr kern="1200" sz="850">
           <a:solidFill>
             <a:schemeClr val="tx1"/>
           </a:solidFill>
@@ -3055,7 +3055,7 @@
         </a:defRPr>
       </a:lvl4pPr>
       <a:lvl5pPr algn="l" defTabSz="342900" eaLnBrk="1" hangingPunct="1" latinLnBrk="0" marL="1371600" rtl="0">
-        <a:defRPr kern="1200" sz="1050">
+        <a:defRPr kern="1200" sz="850">
           <a:solidFill>
             <a:schemeClr val="tx1"/>
           </a:solidFill>
@@ -3065,7 +3065,7 @@
         </a:defRPr>
       </a:lvl5pPr>
       <a:lvl6pPr algn="l" defTabSz="342900" eaLnBrk="1" hangingPunct="1" latinLnBrk="0" marL="1714500" rtl="0">
-        <a:defRPr kern="1200" sz="1050">
+        <a:defRPr kern="1200" sz="850">
           <a:solidFill>
             <a:schemeClr val="tx1"/>
           </a:solidFill>
@@ -3075,7 +3075,7 @@
         </a:defRPr>
       </a:lvl6pPr>
       <a:lvl7pPr algn="l" defTabSz="342900" eaLnBrk="1" hangingPunct="1" latinLnBrk="0" marL="2057400" rtl="0">
-        <a:defRPr kern="1200" sz="1050">
+        <a:defRPr kern="1200" sz="850">
           <a:solidFill>
             <a:schemeClr val="tx1"/>
           </a:solidFill>
@@ -3085,7 +3085,7 @@
         </a:defRPr>
       </a:lvl7pPr>
       <a:lvl8pPr algn="l" defTabSz="342900" eaLnBrk="1" hangingPunct="1" latinLnBrk="0" marL="2400300" rtl="0">
-        <a:defRPr kern="1200" sz="1050">
+        <a:defRPr kern="1200" sz="850">
           <a:solidFill>
             <a:schemeClr val="tx1"/>
           </a:solidFill>
@@ -3095,7 +3095,7 @@
         </a:defRPr>
       </a:lvl8pPr>
       <a:lvl9pPr algn="l" defTabSz="342900" eaLnBrk="1" hangingPunct="1" latinLnBrk="0" marL="2743200" rtl="0">
-        <a:defRPr kern="1200" sz="1050">
+        <a:defRPr kern="1200" sz="850">
           <a:solidFill>
             <a:schemeClr val="tx1"/>
           </a:solidFill>

--- a/05-ridge-lasso-elastic-net/slides.pptx
+++ b/05-ridge-lasso-elastic-net/slides.pptx
@@ -2832,6 +2832,72 @@
               <a:t>‹#›</a:t>
             </a:fld>
             <a:endParaRPr lang="en-US"/>
+          </a:p>
+        </p:txBody>
+      </p:sp>
+      <p:sp>
+        <p:nvSpPr>
+          <p:cNvPr id="7" name="Author Footer"/>
+          <p:cNvSpPr txBox="1"/>
+          <p:nvPr/>
+        </p:nvSpPr>
+        <p:spPr>
+          <a:xfrm>
+            <a:off x="457200" y="4735000"/>
+            <a:ext cx="5000000" cy="260000"/>
+          </a:xfrm>
+          <a:prstGeom prst="rect">
+            <a:avLst/>
+          </a:prstGeom>
+          <a:noFill/>
+        </p:spPr>
+        <p:txBody>
+          <a:bodyPr anchor="ctr" bIns="0" lIns="0" rIns="0" tIns="0" wrap="square"/>
+          <a:lstStyle/>
+          <a:p>
+            <a:pPr algn="l"/>
+            <a:r>
+              <a:rPr dirty="0" lang="en-US" sz="900">
+                <a:solidFill>
+                  <a:srgbClr val="6E7275"/>
+                </a:solidFill>
+                <a:latin typeface="+mn-lt"/>
+              </a:rPr>
+              <a:t>Thierry Warin, PhD</a:t>
+            </a:r>
+          </a:p>
+        </p:txBody>
+      </p:sp>
+      <p:sp>
+        <p:nvSpPr>
+          <p:cNvPr id="8" name="Slide Number Footer"/>
+          <p:cNvSpPr txBox="1"/>
+          <p:nvPr/>
+        </p:nvSpPr>
+        <p:spPr>
+          <a:xfrm>
+            <a:off x="7200000" y="4735000"/>
+            <a:ext cx="1486800" cy="260000"/>
+          </a:xfrm>
+          <a:prstGeom prst="rect">
+            <a:avLst/>
+          </a:prstGeom>
+          <a:noFill/>
+        </p:spPr>
+        <p:txBody>
+          <a:bodyPr anchor="ctr" bIns="0" lIns="0" rIns="0" tIns="0" wrap="square"/>
+          <a:lstStyle/>
+          <a:p>
+            <a:pPr algn="r"/>
+            <a:fld id="{9B1A2C3D-4E5F-6A7B-8C9D-0E1F2A3B4C5D}" type="slidenum">
+              <a:rPr dirty="0" lang="en-US" sz="900">
+                <a:solidFill>
+                  <a:srgbClr val="6E7275"/>
+                </a:solidFill>
+                <a:latin typeface="+mn-lt"/>
+              </a:rPr>
+              <a:t>2</a:t>
+            </a:fld>
           </a:p>
         </p:txBody>
       </p:sp>
@@ -3212,7 +3278,7 @@
             </a:pPr>
             <a:r>
               <a:rPr/>
-              <a:t>18 August 2026</a:t>
+              <a:t>19 August 2026</a:t>
             </a:r>
           </a:p>
         </p:txBody>

--- a/05-ridge-lasso-elastic-net/slides.pptx
+++ b/05-ridge-lasso-elastic-net/slides.pptx
@@ -6909,7 +6909,7 @@
                 </a:pPr>
                 <a:r>
                   <a:rPr/>
-                  <a:t>Build the design matrix on your angle; standardise </a:t>
+                  <a:t>Build the design matrix on your project; standardise </a:t>
                 </a:r>
                 <a:r>
                   <a:rPr b="1"/>

--- a/05-ridge-lasso-elastic-net/slides.pptx
+++ b/05-ridge-lasso-elastic-net/slides.pptx
@@ -6835,7 +6835,7 @@
             </a:pPr>
             <a:r>
               <a:rPr/>
-              <a:t>The lab</a:t>
+              <a:t>The practice</a:t>
             </a:r>
           </a:p>
         </p:txBody>
@@ -7377,7 +7377,7 @@
                 <a:hlinkClick r:id="rId2"/>
                 <a:latin typeface="Courier"/>
               </a:rPr>
-              <a:t>02-lab/README.md</a:t>
+              <a:t>02-practice/README.md</a:t>
             </a:r>
           </a:p>
         </p:txBody>

--- a/05-ridge-lasso-elastic-net/slides.pptx
+++ b/05-ridge-lasso-elastic-net/slides.pptx
@@ -3349,7 +3349,19 @@
                       <m:rPr>
                         <m:sty m:val="p"/>
                       </m:rPr>
-                      <m:t>Var</m:t>
+                      <m:t>V</m:t>
+                    </m:r>
+                    <m:r>
+                      <m:rPr>
+                        <m:sty m:val="p"/>
+                      </m:rPr>
+                      <m:t>a</m:t>
+                    </m:r>
+                    <m:r>
+                      <m:rPr>
+                        <m:sty m:val="p"/>
+                      </m:rPr>
+                      <m:t>r</m:t>
                     </m:r>
                     <m:d>
                       <m:dPr>
@@ -3417,7 +3429,25 @@
                           <m:rPr>
                             <m:sty m:val="p"/>
                           </m:rPr>
-                          <m:t>Bias</m:t>
+                          <m:t>B</m:t>
+                        </m:r>
+                        <m:r>
+                          <m:rPr>
+                            <m:sty m:val="p"/>
+                          </m:rPr>
+                          <m:t>i</m:t>
+                        </m:r>
+                        <m:r>
+                          <m:rPr>
+                            <m:sty m:val="p"/>
+                          </m:rPr>
+                          <m:t>a</m:t>
+                        </m:r>
+                        <m:r>
+                          <m:rPr>
+                            <m:sty m:val="p"/>
+                          </m:rPr>
+                          <m:t>s</m:t>
                         </m:r>
                       </m:e>
                       <m:sup>
@@ -4824,7 +4854,25 @@
                         <m:rPr>
                           <m:sty m:val="p"/>
                         </m:rPr>
-                        <m:t>sign</m:t>
+                        <m:t>s</m:t>
+                      </m:r>
+                      <m:r>
+                        <m:rPr>
+                          <m:sty m:val="p"/>
+                        </m:rPr>
+                        <m:t>i</m:t>
+                      </m:r>
+                      <m:r>
+                        <m:rPr>
+                          <m:sty m:val="p"/>
+                        </m:rPr>
+                        <m:t>g</m:t>
+                      </m:r>
+                      <m:r>
+                        <m:rPr>
+                          <m:sty m:val="p"/>
+                        </m:rPr>
+                        <m:t>n</m:t>
                       </m:r>
                       <m:d>
                         <m:dPr>
@@ -5897,7 +5945,25 @@
                       <m:rPr>
                         <m:sty m:val="p"/>
                       </m:rPr>
-                      <m:t>corr</m:t>
+                      <m:t>c</m:t>
+                    </m:r>
+                    <m:r>
+                      <m:rPr>
+                        <m:sty m:val="p"/>
+                      </m:rPr>
+                      <m:t>o</m:t>
+                    </m:r>
+                    <m:r>
+                      <m:rPr>
+                        <m:sty m:val="p"/>
+                      </m:rPr>
+                      <m:t>r</m:t>
+                    </m:r>
+                    <m:r>
+                      <m:rPr>
+                        <m:sty m:val="p"/>
+                      </m:rPr>
+                      <m:t>r</m:t>
                     </m:r>
                     <m:d>
                       <m:dPr>

--- a/05-ridge-lasso-elastic-net/slides.pptx
+++ b/05-ridge-lasso-elastic-net/slides.pptx
@@ -935,15 +935,15 @@
         </p:nvSpPr>
         <p:spPr>
           <a:xfrm>
-            <a:off x="722313" y="3305176"/>
-            <a:ext cx="7772400" cy="1021556"/>
+            <a:off x="722313" y="1850000"/>
+            <a:ext cx="7772400" cy="1300000"/>
           </a:xfrm>
         </p:spPr>
         <p:txBody>
           <a:bodyPr anchor="t"/>
           <a:lstStyle>
             <a:lvl1pPr algn="l">
-              <a:defRPr sz="1850" b="1" cap="all"/>
+              <a:defRPr sz="2800" b="1" cap="none"/>
             </a:lvl1pPr>
           </a:lstStyle>
           <a:p>
@@ -966,8 +966,8 @@
         </p:nvSpPr>
         <p:spPr>
           <a:xfrm>
-            <a:off x="722313" y="2180035"/>
-            <a:ext cx="7772400" cy="1125140"/>
+            <a:off x="722313" y="3250000"/>
+            <a:ext cx="7772400" cy="700000"/>
           </a:xfrm>
         </p:spPr>
         <p:txBody>
@@ -3555,8 +3555,8 @@
         </p:nvSpPr>
         <p:spPr>
           <a:xfrm>
-            <a:off x="722313" y="3305176"/>
-            <a:ext cx="7772400" cy="1021556"/>
+            <a:off x="722313" y="1850000"/>
+            <a:ext cx="7772400" cy="1300000"/>
           </a:xfrm>
         </p:spPr>
         <p:txBody>
@@ -5335,8 +5335,8 @@
         </p:nvSpPr>
         <p:spPr>
           <a:xfrm>
-            <a:off x="722313" y="3305176"/>
-            <a:ext cx="7772400" cy="1021556"/>
+            <a:off x="722313" y="1850000"/>
+            <a:ext cx="7772400" cy="1300000"/>
           </a:xfrm>
         </p:spPr>
         <p:txBody>
@@ -6340,8 +6340,8 @@
         </p:nvSpPr>
         <p:spPr>
           <a:xfrm>
-            <a:off x="722313" y="3305176"/>
-            <a:ext cx="7772400" cy="1021556"/>
+            <a:off x="722313" y="1850000"/>
+            <a:ext cx="7772400" cy="1300000"/>
           </a:xfrm>
         </p:spPr>
         <p:txBody>
@@ -6888,8 +6888,8 @@
         </p:nvSpPr>
         <p:spPr>
           <a:xfrm>
-            <a:off x="722313" y="3305176"/>
-            <a:ext cx="7772400" cy="1021556"/>
+            <a:off x="722313" y="1850000"/>
+            <a:ext cx="7772400" cy="1300000"/>
           </a:xfrm>
         </p:spPr>
         <p:txBody>
@@ -7540,8 +7540,8 @@
         </p:nvSpPr>
         <p:spPr>
           <a:xfrm>
-            <a:off x="722313" y="3305176"/>
-            <a:ext cx="7772400" cy="1021556"/>
+            <a:off x="722313" y="1850000"/>
+            <a:ext cx="7772400" cy="1300000"/>
           </a:xfrm>
         </p:spPr>
         <p:txBody>
